--- a/materials/pdf/original/DS06_Folien_Automaten-die-antworten.pptx
+++ b/materials/pdf/original/DS06_Folien_Automaten-die-antworten.pptx
@@ -124,19 +124,19 @@
   <p:extLst>
     <p:ext uri="{521415D9-36F7-43E2-AB2F-B90AF26B5E84}">
       <p14:sectionLst xmlns:p14="http://schemas.microsoft.com/office/powerpoint/2010/main">
-        <p14:section name="Start" id="{a326c285-4ef6-7509-b5b7-3110ccc1df6d}">
+        <p14:section name="Start" id="{a9751937-759e-1730-0991-b05c30cc6365}">
           <p14:sldIdLst>
             <p14:sldId id="256"/>
           </p14:sldIdLst>
         </p14:section>
-        <p14:section name="Einstieg" id="{ec34e04e-07bf-9e4b-26cb-1d56ced792cb}">
+        <p14:section name="Einstieg" id="{1b53556b-4699-f553-2404-321ad232fd6c}">
           <p14:sldIdLst>
             <p14:sldId id="257"/>
             <p14:sldId id="258"/>
             <p14:sldId id="259"/>
           </p14:sldIdLst>
         </p14:section>
-        <p14:section name="Erarbeitung" id="{c17e6782-8ed2-d516-8da9-861fd1d4d308}">
+        <p14:section name="Erarbeitung" id="{0b4eebb3-b991-2ede-f13e-39b31e85273a}">
           <p14:sldIdLst>
             <p14:sldId id="260"/>
             <p14:sldId id="261"/>
@@ -146,7 +146,7 @@
             <p14:sldId id="265"/>
           </p14:sldIdLst>
         </p14:section>
-        <p14:section name="Übung" id="{8a2c8eb3-3368-a127-1a78-127fc328cf92}">
+        <p14:section name="Übung" id="{699b4ea7-e0d4-294f-9760-0f0fff904a2a}">
           <p14:sldIdLst>
             <p14:sldId id="266"/>
             <p14:sldId id="267"/>
@@ -154,14 +154,14 @@
             <p14:sldId id="269"/>
           </p14:sldIdLst>
         </p14:section>
-        <p14:section name="Sicherung" id="{93fcf40c-8dd9-0c2f-fed2-17d50c9392f7}">
+        <p14:section name="Sicherung" id="{77264b87-5dc6-dc95-c332-61e17b41e9bc}">
           <p14:sldIdLst>
             <p14:sldId id="270"/>
             <p14:sldId id="271"/>
             <p14:sldId id="272"/>
           </p14:sldIdLst>
         </p14:section>
-        <p14:section name="Abschluss" id="{b4ff864f-afcf-caac-f1b1-115cdfac047a}">
+        <p14:section name="Abschluss" id="{6664796f-4abe-4b30-56b5-bb6193bf0e77}">
           <p14:sldIdLst>
             <p14:sldId id="273"/>
           </p14:sldIdLst>
@@ -2066,7 +2066,7 @@
           <a:p>
             <a:r>
               <a:rPr lang="en-US" dirty="0"/>
-              <a:t>Bei 1212 endet der Automat in S2: Die letzte Münze bleibt als Guthaben für die nächste Kundin (AB 1c).</a:t>
+              <a:t>[NUR LEHRKRAFT] Bei 1212 endet der Automat in S2: Die letzte Münze bleibt als Guthaben für die nächste Kundin (AB 1c).</a:t>
             </a:r>
             <a:endParaRPr lang="en-US" dirty="0"/>
           </a:p>

--- a/materials/pdf/original/DS06_Folien_Automaten-die-antworten.pptx
+++ b/materials/pdf/original/DS06_Folien_Automaten-die-antworten.pptx
@@ -124,19 +124,19 @@
   <p:extLst>
     <p:ext uri="{521415D9-36F7-43E2-AB2F-B90AF26B5E84}">
       <p14:sectionLst xmlns:p14="http://schemas.microsoft.com/office/powerpoint/2010/main">
-        <p14:section name="Start" id="{a9751937-759e-1730-0991-b05c30cc6365}">
+        <p14:section name="Start" id="{e401bae4-7275-a4fb-f35c-93d7c173d207}">
           <p14:sldIdLst>
             <p14:sldId id="256"/>
           </p14:sldIdLst>
         </p14:section>
-        <p14:section name="Einstieg" id="{1b53556b-4699-f553-2404-321ad232fd6c}">
+        <p14:section name="Einstieg" id="{48079627-3da3-f4e7-c3e1-fa0988858fea}">
           <p14:sldIdLst>
             <p14:sldId id="257"/>
             <p14:sldId id="258"/>
             <p14:sldId id="259"/>
           </p14:sldIdLst>
         </p14:section>
-        <p14:section name="Erarbeitung" id="{0b4eebb3-b991-2ede-f13e-39b31e85273a}">
+        <p14:section name="Erarbeitung" id="{7bfc1328-d7a2-c330-14d3-0080b44e2ea7}">
           <p14:sldIdLst>
             <p14:sldId id="260"/>
             <p14:sldId id="261"/>
@@ -146,7 +146,7 @@
             <p14:sldId id="265"/>
           </p14:sldIdLst>
         </p14:section>
-        <p14:section name="Übung" id="{699b4ea7-e0d4-294f-9760-0f0fff904a2a}">
+        <p14:section name="Übung" id="{9f7cfd57-5058-07d5-1aba-c5492ebccb1d}">
           <p14:sldIdLst>
             <p14:sldId id="266"/>
             <p14:sldId id="267"/>
@@ -154,14 +154,14 @@
             <p14:sldId id="269"/>
           </p14:sldIdLst>
         </p14:section>
-        <p14:section name="Sicherung" id="{77264b87-5dc6-dc95-c332-61e17b41e9bc}">
+        <p14:section name="Sicherung" id="{20529dae-636a-b1d1-78fd-816ae9ed0be9}">
           <p14:sldIdLst>
             <p14:sldId id="270"/>
             <p14:sldId id="271"/>
             <p14:sldId id="272"/>
           </p14:sldIdLst>
         </p14:section>
-        <p14:section name="Abschluss" id="{6664796f-4abe-4b30-56b5-bb6193bf0e77}">
+        <p14:section name="Abschluss" id="{ab846320-8d6a-b210-533e-4fc79d11bdae}">
           <p14:sldIdLst>
             <p14:sldId id="273"/>
           </p14:sldIdLst>
@@ -2393,6 +2393,45 @@
       </p:sp>
       <p:sp>
         <p:nvSpPr>
+          <p:cNvPr id="4" name="Text 1"/>
+          <p:cNvSpPr/>
+          <p:nvPr/>
+        </p:nvSpPr>
+        <p:spPr>
+          <a:xfrm>
+            <a:off x="7985455" y="6473952"/>
+            <a:ext cx="2926080" cy="274320"/>
+          </a:xfrm>
+          <a:prstGeom prst="rect">
+            <a:avLst/>
+          </a:prstGeom>
+          <a:noFill/>
+          <a:ln/>
+        </p:spPr>
+        <p:txBody>
+          <a:bodyPr wrap="square" lIns="0" tIns="0" rIns="0" bIns="0" rtlCol="0" anchor="ctr"/>
+          <a:lstStyle/>
+          <a:p>
+            <a:pPr algn="r" indent="0" marL="0">
+              <a:buNone/>
+            </a:pPr>
+            <a:r>
+              <a:rPr lang="en-US" sz="1100" dirty="0">
+                <a:solidFill>
+                  <a:srgbClr val="5B6770"/>
+                </a:solidFill>
+                <a:latin typeface="Calibri" pitchFamily="34" charset="0"/>
+                <a:ea typeface="Calibri" pitchFamily="34" charset="-122"/>
+                <a:cs typeface="Calibri" pitchFamily="34" charset="-120"/>
+              </a:rPr>
+              <a:t>CC BY-SA 4.0 · Frank Juchim</a:t>
+            </a:r>
+            <a:endParaRPr lang="en-US" sz="1100" dirty="0"/>
+          </a:p>
+        </p:txBody>
+      </p:sp>
+      <p:sp>
+        <p:nvSpPr>
           <p:cNvPr id="25" name="Slide Number Placeholder 0"/>
           <p:cNvSpPr>
             <a:spLocks noGrp="1"/>
@@ -2544,6 +2583,45 @@
                 <a:cs typeface="Calibri" pitchFamily="34" charset="-120"/>
               </a:rPr>
               <a:t>Level 6 · Welt A · Endliche Automaten · gA und eA</a:t>
+            </a:r>
+            <a:endParaRPr lang="en-US" sz="1100" dirty="0"/>
+          </a:p>
+        </p:txBody>
+      </p:sp>
+      <p:sp>
+        <p:nvSpPr>
+          <p:cNvPr id="4" name="Text 1"/>
+          <p:cNvSpPr/>
+          <p:nvPr/>
+        </p:nvSpPr>
+        <p:spPr>
+          <a:xfrm>
+            <a:off x="7985455" y="6473952"/>
+            <a:ext cx="2926080" cy="274320"/>
+          </a:xfrm>
+          <a:prstGeom prst="rect">
+            <a:avLst/>
+          </a:prstGeom>
+          <a:noFill/>
+          <a:ln/>
+        </p:spPr>
+        <p:txBody>
+          <a:bodyPr wrap="square" lIns="0" tIns="0" rIns="0" bIns="0" rtlCol="0" anchor="ctr"/>
+          <a:lstStyle/>
+          <a:p>
+            <a:pPr algn="r" indent="0" marL="0">
+              <a:buNone/>
+            </a:pPr>
+            <a:r>
+              <a:rPr lang="en-US" sz="1100" dirty="0">
+                <a:solidFill>
+                  <a:srgbClr val="5B6770"/>
+                </a:solidFill>
+                <a:latin typeface="Calibri" pitchFamily="34" charset="0"/>
+                <a:ea typeface="Calibri" pitchFamily="34" charset="-122"/>
+                <a:cs typeface="Calibri" pitchFamily="34" charset="-120"/>
+              </a:rPr>
+              <a:t>CC BY-SA 4.0 · Frank Juchim</a:t>
             </a:r>
             <a:endParaRPr lang="en-US" sz="1100" dirty="0"/>
           </a:p>
